--- a/img/headers/Presentation_During_Meeting [Auto-saved].pptx
+++ b/img/headers/Presentation_During_Meeting [Auto-saved].pptx
@@ -4,6 +4,9 @@
   <p:sldMasterIdLst>
     <p:sldMasterId id="2147483648" r:id="rId1"/>
   </p:sldMasterIdLst>
+  <p:notesMasterIdLst>
+    <p:notesMasterId r:id="rId31"/>
+  </p:notesMasterIdLst>
   <p:sldIdLst>
     <p:sldId id="256" r:id="rId2"/>
     <p:sldId id="259" r:id="rId3"/>
@@ -23,11 +26,17 @@
     <p:sldId id="275" r:id="rId17"/>
     <p:sldId id="274" r:id="rId18"/>
     <p:sldId id="279" r:id="rId19"/>
-    <p:sldId id="281" r:id="rId20"/>
-    <p:sldId id="280" r:id="rId21"/>
-    <p:sldId id="276" r:id="rId22"/>
-    <p:sldId id="278" r:id="rId23"/>
-    <p:sldId id="277" r:id="rId24"/>
+    <p:sldId id="280" r:id="rId20"/>
+    <p:sldId id="281" r:id="rId21"/>
+    <p:sldId id="278" r:id="rId22"/>
+    <p:sldId id="276" r:id="rId23"/>
+    <p:sldId id="283" r:id="rId24"/>
+    <p:sldId id="282" r:id="rId25"/>
+    <p:sldId id="286" r:id="rId26"/>
+    <p:sldId id="287" r:id="rId27"/>
+    <p:sldId id="285" r:id="rId28"/>
+    <p:sldId id="284" r:id="rId29"/>
+    <p:sldId id="277" r:id="rId30"/>
   </p:sldIdLst>
   <p:sldSz cx="12192000" cy="6858000"/>
   <p:notesSz cx="6858000" cy="9144000"/>
@@ -1920,6 +1929,439 @@
 </cs:chartStyle>
 </file>
 
+<file path=ppt/notesMasters/notesMaster1.xml><?xml version="1.0" encoding="utf-8"?>
+<p:notesMaster xmlns:a="http://schemas.openxmlformats.org/drawingml/2006/main" xmlns:r="http://schemas.openxmlformats.org/officeDocument/2006/relationships" xmlns:p="http://schemas.openxmlformats.org/presentationml/2006/main">
+  <p:cSld>
+    <p:bg>
+      <p:bgRef idx="1001">
+        <a:schemeClr val="bg1"/>
+      </p:bgRef>
+    </p:bg>
+    <p:spTree>
+      <p:nvGrpSpPr>
+        <p:cNvPr id="1" name=""/>
+        <p:cNvGrpSpPr/>
+        <p:nvPr/>
+      </p:nvGrpSpPr>
+      <p:grpSpPr>
+        <a:xfrm>
+          <a:off x="0" y="0"/>
+          <a:ext cx="0" cy="0"/>
+          <a:chOff x="0" y="0"/>
+          <a:chExt cx="0" cy="0"/>
+        </a:xfrm>
+      </p:grpSpPr>
+      <p:sp>
+        <p:nvSpPr>
+          <p:cNvPr id="2" name="Header Placeholder 1"/>
+          <p:cNvSpPr>
+            <a:spLocks noGrp="1"/>
+          </p:cNvSpPr>
+          <p:nvPr>
+            <p:ph type="hdr" sz="quarter"/>
+          </p:nvPr>
+        </p:nvSpPr>
+        <p:spPr>
+          <a:xfrm>
+            <a:off x="0" y="0"/>
+            <a:ext cx="2971800" cy="458788"/>
+          </a:xfrm>
+          <a:prstGeom prst="rect">
+            <a:avLst/>
+          </a:prstGeom>
+        </p:spPr>
+        <p:txBody>
+          <a:bodyPr vert="horz" lIns="91440" tIns="45720" rIns="91440" bIns="45720" rtlCol="0"/>
+          <a:lstStyle>
+            <a:lvl1pPr algn="l">
+              <a:defRPr sz="1200"/>
+            </a:lvl1pPr>
+          </a:lstStyle>
+          <a:p>
+            <a:endParaRPr lang="en-GB"/>
+          </a:p>
+        </p:txBody>
+      </p:sp>
+      <p:sp>
+        <p:nvSpPr>
+          <p:cNvPr id="3" name="Date Placeholder 2"/>
+          <p:cNvSpPr>
+            <a:spLocks noGrp="1"/>
+          </p:cNvSpPr>
+          <p:nvPr>
+            <p:ph type="dt" idx="1"/>
+          </p:nvPr>
+        </p:nvSpPr>
+        <p:spPr>
+          <a:xfrm>
+            <a:off x="3884613" y="0"/>
+            <a:ext cx="2971800" cy="458788"/>
+          </a:xfrm>
+          <a:prstGeom prst="rect">
+            <a:avLst/>
+          </a:prstGeom>
+        </p:spPr>
+        <p:txBody>
+          <a:bodyPr vert="horz" lIns="91440" tIns="45720" rIns="91440" bIns="45720" rtlCol="0"/>
+          <a:lstStyle>
+            <a:lvl1pPr algn="r">
+              <a:defRPr sz="1200"/>
+            </a:lvl1pPr>
+          </a:lstStyle>
+          <a:p>
+            <a:fld id="{A5C25525-F7D1-5B4F-9342-E93CEDD79A5C}" type="datetimeFigureOut">
+              <a:rPr lang="en-GB" smtClean="0"/>
+              <a:t>04/02/2023</a:t>
+            </a:fld>
+            <a:endParaRPr lang="en-GB"/>
+          </a:p>
+        </p:txBody>
+      </p:sp>
+      <p:sp>
+        <p:nvSpPr>
+          <p:cNvPr id="4" name="Slide Image Placeholder 3"/>
+          <p:cNvSpPr>
+            <a:spLocks noGrp="1" noRot="1" noChangeAspect="1"/>
+          </p:cNvSpPr>
+          <p:nvPr>
+            <p:ph type="sldImg" idx="2"/>
+          </p:nvPr>
+        </p:nvSpPr>
+        <p:spPr>
+          <a:xfrm>
+            <a:off x="685800" y="1143000"/>
+            <a:ext cx="5486400" cy="3086100"/>
+          </a:xfrm>
+          <a:prstGeom prst="rect">
+            <a:avLst/>
+          </a:prstGeom>
+          <a:noFill/>
+          <a:ln w="12700">
+            <a:solidFill>
+              <a:prstClr val="black"/>
+            </a:solidFill>
+          </a:ln>
+        </p:spPr>
+        <p:txBody>
+          <a:bodyPr vert="horz" lIns="91440" tIns="45720" rIns="91440" bIns="45720" rtlCol="0" anchor="ctr"/>
+          <a:lstStyle/>
+          <a:p>
+            <a:endParaRPr lang="en-GB"/>
+          </a:p>
+        </p:txBody>
+      </p:sp>
+      <p:sp>
+        <p:nvSpPr>
+          <p:cNvPr id="5" name="Notes Placeholder 4"/>
+          <p:cNvSpPr>
+            <a:spLocks noGrp="1"/>
+          </p:cNvSpPr>
+          <p:nvPr>
+            <p:ph type="body" sz="quarter" idx="3"/>
+          </p:nvPr>
+        </p:nvSpPr>
+        <p:spPr>
+          <a:xfrm>
+            <a:off x="685800" y="4400550"/>
+            <a:ext cx="5486400" cy="3600450"/>
+          </a:xfrm>
+          <a:prstGeom prst="rect">
+            <a:avLst/>
+          </a:prstGeom>
+        </p:spPr>
+        <p:txBody>
+          <a:bodyPr vert="horz" lIns="91440" tIns="45720" rIns="91440" bIns="45720" rtlCol="0"/>
+          <a:lstStyle/>
+          <a:p>
+            <a:pPr lvl="0"/>
+            <a:r>
+              <a:rPr lang="en-GB"/>
+              <a:t>Click to edit Master text styles</a:t>
+            </a:r>
+          </a:p>
+          <a:p>
+            <a:pPr lvl="1"/>
+            <a:r>
+              <a:rPr lang="en-GB"/>
+              <a:t>Second level</a:t>
+            </a:r>
+          </a:p>
+          <a:p>
+            <a:pPr lvl="2"/>
+            <a:r>
+              <a:rPr lang="en-GB"/>
+              <a:t>Third level</a:t>
+            </a:r>
+          </a:p>
+          <a:p>
+            <a:pPr lvl="3"/>
+            <a:r>
+              <a:rPr lang="en-GB"/>
+              <a:t>Fourth level</a:t>
+            </a:r>
+          </a:p>
+          <a:p>
+            <a:pPr lvl="4"/>
+            <a:r>
+              <a:rPr lang="en-GB"/>
+              <a:t>Fifth level</a:t>
+            </a:r>
+          </a:p>
+        </p:txBody>
+      </p:sp>
+      <p:sp>
+        <p:nvSpPr>
+          <p:cNvPr id="6" name="Footer Placeholder 5"/>
+          <p:cNvSpPr>
+            <a:spLocks noGrp="1"/>
+          </p:cNvSpPr>
+          <p:nvPr>
+            <p:ph type="ftr" sz="quarter" idx="4"/>
+          </p:nvPr>
+        </p:nvSpPr>
+        <p:spPr>
+          <a:xfrm>
+            <a:off x="0" y="8685213"/>
+            <a:ext cx="2971800" cy="458787"/>
+          </a:xfrm>
+          <a:prstGeom prst="rect">
+            <a:avLst/>
+          </a:prstGeom>
+        </p:spPr>
+        <p:txBody>
+          <a:bodyPr vert="horz" lIns="91440" tIns="45720" rIns="91440" bIns="45720" rtlCol="0" anchor="b"/>
+          <a:lstStyle>
+            <a:lvl1pPr algn="l">
+              <a:defRPr sz="1200"/>
+            </a:lvl1pPr>
+          </a:lstStyle>
+          <a:p>
+            <a:endParaRPr lang="en-GB"/>
+          </a:p>
+        </p:txBody>
+      </p:sp>
+      <p:sp>
+        <p:nvSpPr>
+          <p:cNvPr id="7" name="Slide Number Placeholder 6"/>
+          <p:cNvSpPr>
+            <a:spLocks noGrp="1"/>
+          </p:cNvSpPr>
+          <p:nvPr>
+            <p:ph type="sldNum" sz="quarter" idx="5"/>
+          </p:nvPr>
+        </p:nvSpPr>
+        <p:spPr>
+          <a:xfrm>
+            <a:off x="3884613" y="8685213"/>
+            <a:ext cx="2971800" cy="458787"/>
+          </a:xfrm>
+          <a:prstGeom prst="rect">
+            <a:avLst/>
+          </a:prstGeom>
+        </p:spPr>
+        <p:txBody>
+          <a:bodyPr vert="horz" lIns="91440" tIns="45720" rIns="91440" bIns="45720" rtlCol="0" anchor="b"/>
+          <a:lstStyle>
+            <a:lvl1pPr algn="r">
+              <a:defRPr sz="1200"/>
+            </a:lvl1pPr>
+          </a:lstStyle>
+          <a:p>
+            <a:fld id="{E03E1C09-7258-5347-BA94-45245C824DBB}" type="slidenum">
+              <a:rPr lang="en-GB" smtClean="0"/>
+              <a:t>‹#›</a:t>
+            </a:fld>
+            <a:endParaRPr lang="en-GB"/>
+          </a:p>
+        </p:txBody>
+      </p:sp>
+    </p:spTree>
+    <p:extLst>
+      <p:ext uri="{BB962C8B-B14F-4D97-AF65-F5344CB8AC3E}">
+        <p14:creationId xmlns:p14="http://schemas.microsoft.com/office/powerpoint/2010/main" val="1887037656"/>
+      </p:ext>
+    </p:extLst>
+  </p:cSld>
+  <p:clrMap bg1="lt1" tx1="dk1" bg2="lt2" tx2="dk2" accent1="accent1" accent2="accent2" accent3="accent3" accent4="accent4" accent5="accent5" accent6="accent6" hlink="hlink" folHlink="folHlink"/>
+  <p:notesStyle>
+    <a:lvl1pPr marL="0" algn="l" defTabSz="914400" rtl="0" eaLnBrk="1" latinLnBrk="0" hangingPunct="1">
+      <a:defRPr sz="1200" kern="1200">
+        <a:solidFill>
+          <a:schemeClr val="tx1"/>
+        </a:solidFill>
+        <a:latin typeface="+mn-lt"/>
+        <a:ea typeface="+mn-ea"/>
+        <a:cs typeface="+mn-cs"/>
+      </a:defRPr>
+    </a:lvl1pPr>
+    <a:lvl2pPr marL="457200" algn="l" defTabSz="914400" rtl="0" eaLnBrk="1" latinLnBrk="0" hangingPunct="1">
+      <a:defRPr sz="1200" kern="1200">
+        <a:solidFill>
+          <a:schemeClr val="tx1"/>
+        </a:solidFill>
+        <a:latin typeface="+mn-lt"/>
+        <a:ea typeface="+mn-ea"/>
+        <a:cs typeface="+mn-cs"/>
+      </a:defRPr>
+    </a:lvl2pPr>
+    <a:lvl3pPr marL="914400" algn="l" defTabSz="914400" rtl="0" eaLnBrk="1" latinLnBrk="0" hangingPunct="1">
+      <a:defRPr sz="1200" kern="1200">
+        <a:solidFill>
+          <a:schemeClr val="tx1"/>
+        </a:solidFill>
+        <a:latin typeface="+mn-lt"/>
+        <a:ea typeface="+mn-ea"/>
+        <a:cs typeface="+mn-cs"/>
+      </a:defRPr>
+    </a:lvl3pPr>
+    <a:lvl4pPr marL="1371600" algn="l" defTabSz="914400" rtl="0" eaLnBrk="1" latinLnBrk="0" hangingPunct="1">
+      <a:defRPr sz="1200" kern="1200">
+        <a:solidFill>
+          <a:schemeClr val="tx1"/>
+        </a:solidFill>
+        <a:latin typeface="+mn-lt"/>
+        <a:ea typeface="+mn-ea"/>
+        <a:cs typeface="+mn-cs"/>
+      </a:defRPr>
+    </a:lvl4pPr>
+    <a:lvl5pPr marL="1828800" algn="l" defTabSz="914400" rtl="0" eaLnBrk="1" latinLnBrk="0" hangingPunct="1">
+      <a:defRPr sz="1200" kern="1200">
+        <a:solidFill>
+          <a:schemeClr val="tx1"/>
+        </a:solidFill>
+        <a:latin typeface="+mn-lt"/>
+        <a:ea typeface="+mn-ea"/>
+        <a:cs typeface="+mn-cs"/>
+      </a:defRPr>
+    </a:lvl5pPr>
+    <a:lvl6pPr marL="2286000" algn="l" defTabSz="914400" rtl="0" eaLnBrk="1" latinLnBrk="0" hangingPunct="1">
+      <a:defRPr sz="1200" kern="1200">
+        <a:solidFill>
+          <a:schemeClr val="tx1"/>
+        </a:solidFill>
+        <a:latin typeface="+mn-lt"/>
+        <a:ea typeface="+mn-ea"/>
+        <a:cs typeface="+mn-cs"/>
+      </a:defRPr>
+    </a:lvl6pPr>
+    <a:lvl7pPr marL="2743200" algn="l" defTabSz="914400" rtl="0" eaLnBrk="1" latinLnBrk="0" hangingPunct="1">
+      <a:defRPr sz="1200" kern="1200">
+        <a:solidFill>
+          <a:schemeClr val="tx1"/>
+        </a:solidFill>
+        <a:latin typeface="+mn-lt"/>
+        <a:ea typeface="+mn-ea"/>
+        <a:cs typeface="+mn-cs"/>
+      </a:defRPr>
+    </a:lvl7pPr>
+    <a:lvl8pPr marL="3200400" algn="l" defTabSz="914400" rtl="0" eaLnBrk="1" latinLnBrk="0" hangingPunct="1">
+      <a:defRPr sz="1200" kern="1200">
+        <a:solidFill>
+          <a:schemeClr val="tx1"/>
+        </a:solidFill>
+        <a:latin typeface="+mn-lt"/>
+        <a:ea typeface="+mn-ea"/>
+        <a:cs typeface="+mn-cs"/>
+      </a:defRPr>
+    </a:lvl8pPr>
+    <a:lvl9pPr marL="3657600" algn="l" defTabSz="914400" rtl="0" eaLnBrk="1" latinLnBrk="0" hangingPunct="1">
+      <a:defRPr sz="1200" kern="1200">
+        <a:solidFill>
+          <a:schemeClr val="tx1"/>
+        </a:solidFill>
+        <a:latin typeface="+mn-lt"/>
+        <a:ea typeface="+mn-ea"/>
+        <a:cs typeface="+mn-cs"/>
+      </a:defRPr>
+    </a:lvl9pPr>
+  </p:notesStyle>
+</p:notesMaster>
+</file>
+
+<file path=ppt/notesSlides/notesSlide1.xml><?xml version="1.0" encoding="utf-8"?>
+<p:notes xmlns:a="http://schemas.openxmlformats.org/drawingml/2006/main" xmlns:r="http://schemas.openxmlformats.org/officeDocument/2006/relationships" xmlns:p="http://schemas.openxmlformats.org/presentationml/2006/main">
+  <p:cSld>
+    <p:spTree>
+      <p:nvGrpSpPr>
+        <p:cNvPr id="1" name=""/>
+        <p:cNvGrpSpPr/>
+        <p:nvPr/>
+      </p:nvGrpSpPr>
+      <p:grpSpPr>
+        <a:xfrm>
+          <a:off x="0" y="0"/>
+          <a:ext cx="0" cy="0"/>
+          <a:chOff x="0" y="0"/>
+          <a:chExt cx="0" cy="0"/>
+        </a:xfrm>
+      </p:grpSpPr>
+      <p:sp>
+        <p:nvSpPr>
+          <p:cNvPr id="2" name="Slide Image Placeholder 1"/>
+          <p:cNvSpPr>
+            <a:spLocks noGrp="1" noRot="1" noChangeAspect="1"/>
+          </p:cNvSpPr>
+          <p:nvPr>
+            <p:ph type="sldImg"/>
+          </p:nvPr>
+        </p:nvSpPr>
+        <p:spPr/>
+      </p:sp>
+      <p:sp>
+        <p:nvSpPr>
+          <p:cNvPr id="3" name="Notes Placeholder 2"/>
+          <p:cNvSpPr>
+            <a:spLocks noGrp="1"/>
+          </p:cNvSpPr>
+          <p:nvPr>
+            <p:ph type="body" idx="1"/>
+          </p:nvPr>
+        </p:nvSpPr>
+        <p:spPr/>
+        <p:txBody>
+          <a:bodyPr/>
+          <a:lstStyle/>
+          <a:p>
+            <a:endParaRPr lang="en-GB" dirty="0"/>
+          </a:p>
+        </p:txBody>
+      </p:sp>
+      <p:sp>
+        <p:nvSpPr>
+          <p:cNvPr id="4" name="Slide Number Placeholder 3"/>
+          <p:cNvSpPr>
+            <a:spLocks noGrp="1"/>
+          </p:cNvSpPr>
+          <p:nvPr>
+            <p:ph type="sldNum" sz="quarter" idx="5"/>
+          </p:nvPr>
+        </p:nvSpPr>
+        <p:spPr/>
+        <p:txBody>
+          <a:bodyPr/>
+          <a:lstStyle/>
+          <a:p>
+            <a:fld id="{E03E1C09-7258-5347-BA94-45245C824DBB}" type="slidenum">
+              <a:rPr lang="en-GB" smtClean="0"/>
+              <a:t>26</a:t>
+            </a:fld>
+            <a:endParaRPr lang="en-GB"/>
+          </a:p>
+        </p:txBody>
+      </p:sp>
+    </p:spTree>
+    <p:extLst>
+      <p:ext uri="{BB962C8B-B14F-4D97-AF65-F5344CB8AC3E}">
+        <p14:creationId xmlns:p14="http://schemas.microsoft.com/office/powerpoint/2010/main" val="3467899440"/>
+      </p:ext>
+    </p:extLst>
+  </p:cSld>
+  <p:clrMapOvr>
+    <a:masterClrMapping/>
+  </p:clrMapOvr>
+</p:notes>
+</file>
+
 <file path=ppt/slideLayouts/slideLayout1.xml><?xml version="1.0" encoding="utf-8"?>
 <p:sldLayout xmlns:a="http://schemas.openxmlformats.org/drawingml/2006/main" xmlns:r="http://schemas.openxmlformats.org/officeDocument/2006/relationships" xmlns:p="http://schemas.openxmlformats.org/presentationml/2006/main" type="title" preserve="1">
   <p:cSld name="Title Slide">
@@ -2067,7 +2509,7 @@
           <a:p>
             <a:fld id="{AE31A6DE-3705-5747-AEBF-BD3705E1DA93}" type="datetimeFigureOut">
               <a:rPr lang="en-GB" smtClean="0"/>
-              <a:t>23/01/2023</a:t>
+              <a:t>04/02/2023</a:t>
             </a:fld>
             <a:endParaRPr lang="en-GB" dirty="0"/>
           </a:p>
@@ -2265,7 +2707,7 @@
           <a:p>
             <a:fld id="{AE31A6DE-3705-5747-AEBF-BD3705E1DA93}" type="datetimeFigureOut">
               <a:rPr lang="en-GB" smtClean="0"/>
-              <a:t>23/01/2023</a:t>
+              <a:t>04/02/2023</a:t>
             </a:fld>
             <a:endParaRPr lang="en-GB" dirty="0"/>
           </a:p>
@@ -2473,7 +2915,7 @@
           <a:p>
             <a:fld id="{AE31A6DE-3705-5747-AEBF-BD3705E1DA93}" type="datetimeFigureOut">
               <a:rPr lang="en-GB" smtClean="0"/>
-              <a:t>23/01/2023</a:t>
+              <a:t>04/02/2023</a:t>
             </a:fld>
             <a:endParaRPr lang="en-GB" dirty="0"/>
           </a:p>
@@ -2671,7 +3113,7 @@
           <a:p>
             <a:fld id="{AE31A6DE-3705-5747-AEBF-BD3705E1DA93}" type="datetimeFigureOut">
               <a:rPr lang="en-GB" smtClean="0"/>
-              <a:t>23/01/2023</a:t>
+              <a:t>04/02/2023</a:t>
             </a:fld>
             <a:endParaRPr lang="en-GB" dirty="0"/>
           </a:p>
@@ -2946,7 +3388,7 @@
           <a:p>
             <a:fld id="{AE31A6DE-3705-5747-AEBF-BD3705E1DA93}" type="datetimeFigureOut">
               <a:rPr lang="en-GB" smtClean="0"/>
-              <a:t>23/01/2023</a:t>
+              <a:t>04/02/2023</a:t>
             </a:fld>
             <a:endParaRPr lang="en-GB" dirty="0"/>
           </a:p>
@@ -3211,7 +3653,7 @@
           <a:p>
             <a:fld id="{AE31A6DE-3705-5747-AEBF-BD3705E1DA93}" type="datetimeFigureOut">
               <a:rPr lang="en-GB" smtClean="0"/>
-              <a:t>23/01/2023</a:t>
+              <a:t>04/02/2023</a:t>
             </a:fld>
             <a:endParaRPr lang="en-GB" dirty="0"/>
           </a:p>
@@ -3623,7 +4065,7 @@
           <a:p>
             <a:fld id="{AE31A6DE-3705-5747-AEBF-BD3705E1DA93}" type="datetimeFigureOut">
               <a:rPr lang="en-GB" smtClean="0"/>
-              <a:t>23/01/2023</a:t>
+              <a:t>04/02/2023</a:t>
             </a:fld>
             <a:endParaRPr lang="en-GB" dirty="0"/>
           </a:p>
@@ -3764,7 +4206,7 @@
           <a:p>
             <a:fld id="{AE31A6DE-3705-5747-AEBF-BD3705E1DA93}" type="datetimeFigureOut">
               <a:rPr lang="en-GB" smtClean="0"/>
-              <a:t>23/01/2023</a:t>
+              <a:t>04/02/2023</a:t>
             </a:fld>
             <a:endParaRPr lang="en-GB" dirty="0"/>
           </a:p>
@@ -3877,7 +4319,7 @@
           <a:p>
             <a:fld id="{AE31A6DE-3705-5747-AEBF-BD3705E1DA93}" type="datetimeFigureOut">
               <a:rPr lang="en-GB" smtClean="0"/>
-              <a:t>23/01/2023</a:t>
+              <a:t>04/02/2023</a:t>
             </a:fld>
             <a:endParaRPr lang="en-GB" dirty="0"/>
           </a:p>
@@ -4188,7 +4630,7 @@
           <a:p>
             <a:fld id="{AE31A6DE-3705-5747-AEBF-BD3705E1DA93}" type="datetimeFigureOut">
               <a:rPr lang="en-GB" smtClean="0"/>
-              <a:t>23/01/2023</a:t>
+              <a:t>04/02/2023</a:t>
             </a:fld>
             <a:endParaRPr lang="en-GB" dirty="0"/>
           </a:p>
@@ -4476,7 +4918,7 @@
           <a:p>
             <a:fld id="{AE31A6DE-3705-5747-AEBF-BD3705E1DA93}" type="datetimeFigureOut">
               <a:rPr lang="en-GB" smtClean="0"/>
-              <a:t>23/01/2023</a:t>
+              <a:t>04/02/2023</a:t>
             </a:fld>
             <a:endParaRPr lang="en-GB" dirty="0"/>
           </a:p>
@@ -4717,7 +5159,7 @@
           <a:p>
             <a:fld id="{AE31A6DE-3705-5747-AEBF-BD3705E1DA93}" type="datetimeFigureOut">
               <a:rPr lang="en-GB" smtClean="0"/>
-              <a:t>23/01/2023</a:t>
+              <a:t>04/02/2023</a:t>
             </a:fld>
             <a:endParaRPr lang="en-GB" dirty="0"/>
           </a:p>
@@ -9422,7 +9864,7 @@
         </p:blipFill>
         <p:spPr>
           <a:xfrm>
-            <a:off x="4419600" y="2426359"/>
+            <a:off x="4419600" y="2316515"/>
             <a:ext cx="7772400" cy="4431641"/>
           </a:xfrm>
           <a:prstGeom prst="rect">
@@ -9452,8 +9894,8 @@
         </p:blipFill>
         <p:spPr>
           <a:xfrm>
-            <a:off x="0" y="3106154"/>
-            <a:ext cx="6096000" cy="1326176"/>
+            <a:off x="0" y="3106153"/>
+            <a:ext cx="6096000" cy="1498503"/>
           </a:xfrm>
           <a:prstGeom prst="rect">
             <a:avLst/>
@@ -9495,7 +9937,7 @@
           <p:cNvPr id="4" name="Picture 3">
             <a:extLst>
               <a:ext uri="{FF2B5EF4-FFF2-40B4-BE49-F238E27FC236}">
-                <a16:creationId xmlns:a16="http://schemas.microsoft.com/office/drawing/2014/main" id="{A8B67751-3B5C-36EE-B686-92A78D63BA2D}"/>
+                <a16:creationId xmlns:a16="http://schemas.microsoft.com/office/drawing/2014/main" id="{F719C860-5CDF-58B2-2C5B-35098F8E76DF}"/>
               </a:ext>
             </a:extLst>
           </p:cNvPr>
@@ -9512,8 +9954,8 @@
         </p:blipFill>
         <p:spPr>
           <a:xfrm>
-            <a:off x="0" y="0"/>
-            <a:ext cx="6446365" cy="6858000"/>
+            <a:off x="0" y="16329"/>
+            <a:ext cx="9095014" cy="6780512"/>
           </a:xfrm>
           <a:prstGeom prst="rect">
             <a:avLst/>
@@ -9523,7 +9965,7 @@
     </p:spTree>
     <p:extLst>
       <p:ext uri="{BB962C8B-B14F-4D97-AF65-F5344CB8AC3E}">
-        <p14:creationId xmlns:p14="http://schemas.microsoft.com/office/powerpoint/2010/main" val="2690613205"/>
+        <p14:creationId xmlns:p14="http://schemas.microsoft.com/office/powerpoint/2010/main" val="1724084893"/>
       </p:ext>
     </p:extLst>
   </p:cSld>
@@ -10275,7 +10717,7 @@
           <p:cNvPr id="4" name="Picture 3">
             <a:extLst>
               <a:ext uri="{FF2B5EF4-FFF2-40B4-BE49-F238E27FC236}">
-                <a16:creationId xmlns:a16="http://schemas.microsoft.com/office/drawing/2014/main" id="{F719C860-5CDF-58B2-2C5B-35098F8E76DF}"/>
+                <a16:creationId xmlns:a16="http://schemas.microsoft.com/office/drawing/2014/main" id="{A8B67751-3B5C-36EE-B686-92A78D63BA2D}"/>
               </a:ext>
             </a:extLst>
           </p:cNvPr>
@@ -10293,7 +10735,7 @@
         <p:spPr>
           <a:xfrm>
             <a:off x="0" y="0"/>
-            <a:ext cx="7772400" cy="5794477"/>
+            <a:ext cx="6446365" cy="6858000"/>
           </a:xfrm>
           <a:prstGeom prst="rect">
             <a:avLst/>
@@ -10303,7 +10745,7 @@
     </p:spTree>
     <p:extLst>
       <p:ext uri="{BB962C8B-B14F-4D97-AF65-F5344CB8AC3E}">
-        <p14:creationId xmlns:p14="http://schemas.microsoft.com/office/powerpoint/2010/main" val="1724084893"/>
+        <p14:creationId xmlns:p14="http://schemas.microsoft.com/office/powerpoint/2010/main" val="2690613205"/>
       </p:ext>
     </p:extLst>
   </p:cSld>
@@ -10314,6 +10756,94 @@
 </file>
 
 <file path=ppt/slides/slide21.xml><?xml version="1.0" encoding="utf-8"?>
+<p:sld xmlns:a="http://schemas.openxmlformats.org/drawingml/2006/main" xmlns:r="http://schemas.openxmlformats.org/officeDocument/2006/relationships" xmlns:p="http://schemas.openxmlformats.org/presentationml/2006/main">
+  <p:cSld>
+    <p:spTree>
+      <p:nvGrpSpPr>
+        <p:cNvPr id="1" name=""/>
+        <p:cNvGrpSpPr/>
+        <p:nvPr/>
+      </p:nvGrpSpPr>
+      <p:grpSpPr>
+        <a:xfrm>
+          <a:off x="0" y="0"/>
+          <a:ext cx="0" cy="0"/>
+          <a:chOff x="0" y="0"/>
+          <a:chExt cx="0" cy="0"/>
+        </a:xfrm>
+      </p:grpSpPr>
+      <p:sp>
+        <p:nvSpPr>
+          <p:cNvPr id="2" name="Title 1">
+            <a:extLst>
+              <a:ext uri="{FF2B5EF4-FFF2-40B4-BE49-F238E27FC236}">
+                <a16:creationId xmlns:a16="http://schemas.microsoft.com/office/drawing/2014/main" id="{537316FB-354F-8A5A-466F-84DBDFAF671D}"/>
+              </a:ext>
+            </a:extLst>
+          </p:cNvPr>
+          <p:cNvSpPr>
+            <a:spLocks noGrp="1"/>
+          </p:cNvSpPr>
+          <p:nvPr>
+            <p:ph type="title"/>
+          </p:nvPr>
+        </p:nvSpPr>
+        <p:spPr/>
+        <p:txBody>
+          <a:bodyPr>
+            <a:normAutofit/>
+          </a:bodyPr>
+          <a:lstStyle/>
+          <a:p>
+            <a:r>
+              <a:rPr lang="en-GB" dirty="0"/>
+              <a:t>Domain-Invariant Mapping Network (DIMN)</a:t>
+            </a:r>
+          </a:p>
+        </p:txBody>
+      </p:sp>
+      <p:sp>
+        <p:nvSpPr>
+          <p:cNvPr id="3" name="Content Placeholder 2">
+            <a:extLst>
+              <a:ext uri="{FF2B5EF4-FFF2-40B4-BE49-F238E27FC236}">
+                <a16:creationId xmlns:a16="http://schemas.microsoft.com/office/drawing/2014/main" id="{28DF7CE6-CFB2-EC08-BF92-52DCFAC29311}"/>
+              </a:ext>
+            </a:extLst>
+          </p:cNvPr>
+          <p:cNvSpPr>
+            <a:spLocks noGrp="1"/>
+          </p:cNvSpPr>
+          <p:nvPr>
+            <p:ph idx="1"/>
+          </p:nvPr>
+        </p:nvSpPr>
+        <p:spPr/>
+        <p:txBody>
+          <a:bodyPr/>
+          <a:lstStyle/>
+          <a:p>
+            <a:r>
+              <a:rPr lang="en-GB" dirty="0"/>
+              <a:t>is designed to learn a mapping between a person image and its identity classifier, i.e., it produces a classifier using a single shot.</a:t>
+            </a:r>
+          </a:p>
+        </p:txBody>
+      </p:sp>
+    </p:spTree>
+    <p:extLst>
+      <p:ext uri="{BB962C8B-B14F-4D97-AF65-F5344CB8AC3E}">
+        <p14:creationId xmlns:p14="http://schemas.microsoft.com/office/powerpoint/2010/main" val="68043242"/>
+      </p:ext>
+    </p:extLst>
+  </p:cSld>
+  <p:clrMapOvr>
+    <a:masterClrMapping/>
+  </p:clrMapOvr>
+</p:sld>
+</file>
+
+<file path=ppt/slides/slide22.xml><?xml version="1.0" encoding="utf-8"?>
 <p:sld xmlns:a="http://schemas.openxmlformats.org/drawingml/2006/main" xmlns:r="http://schemas.openxmlformats.org/officeDocument/2006/relationships" xmlns:p="http://schemas.openxmlformats.org/presentationml/2006/main">
   <p:cSld>
     <p:spTree>
@@ -10732,7 +11262,168 @@
 </p:sld>
 </file>
 
-<file path=ppt/slides/slide22.xml><?xml version="1.0" encoding="utf-8"?>
+<file path=ppt/slides/slide23.xml><?xml version="1.0" encoding="utf-8"?>
+<p:sld xmlns:a="http://schemas.openxmlformats.org/drawingml/2006/main" xmlns:r="http://schemas.openxmlformats.org/officeDocument/2006/relationships" xmlns:p="http://schemas.openxmlformats.org/presentationml/2006/main">
+  <p:cSld>
+    <p:spTree>
+      <p:nvGrpSpPr>
+        <p:cNvPr id="1" name=""/>
+        <p:cNvGrpSpPr/>
+        <p:nvPr/>
+      </p:nvGrpSpPr>
+      <p:grpSpPr>
+        <a:xfrm>
+          <a:off x="0" y="0"/>
+          <a:ext cx="0" cy="0"/>
+          <a:chOff x="0" y="0"/>
+          <a:chExt cx="0" cy="0"/>
+        </a:xfrm>
+      </p:grpSpPr>
+      <p:pic>
+        <p:nvPicPr>
+          <p:cNvPr id="8" name="Picture 7">
+            <a:extLst>
+              <a:ext uri="{FF2B5EF4-FFF2-40B4-BE49-F238E27FC236}">
+                <a16:creationId xmlns:a16="http://schemas.microsoft.com/office/drawing/2014/main" id="{B67ED18E-BF93-72A4-71FE-CDF2DBFCA4E3}"/>
+              </a:ext>
+            </a:extLst>
+          </p:cNvPr>
+          <p:cNvPicPr>
+            <a:picLocks noChangeAspect="1"/>
+          </p:cNvPicPr>
+          <p:nvPr/>
+        </p:nvPicPr>
+        <p:blipFill>
+          <a:blip r:embed="rId2"/>
+          <a:stretch>
+            <a:fillRect/>
+          </a:stretch>
+        </p:blipFill>
+        <p:spPr>
+          <a:xfrm>
+            <a:off x="291614" y="363958"/>
+            <a:ext cx="4108481" cy="1767953"/>
+          </a:xfrm>
+          <a:prstGeom prst="rect">
+            <a:avLst/>
+          </a:prstGeom>
+        </p:spPr>
+      </p:pic>
+      <p:pic>
+        <p:nvPicPr>
+          <p:cNvPr id="4" name="Content Placeholder 3">
+            <a:extLst>
+              <a:ext uri="{FF2B5EF4-FFF2-40B4-BE49-F238E27FC236}">
+                <a16:creationId xmlns:a16="http://schemas.microsoft.com/office/drawing/2014/main" id="{3C017381-9A98-EC5E-3B91-869E289B249D}"/>
+              </a:ext>
+            </a:extLst>
+          </p:cNvPr>
+          <p:cNvPicPr>
+            <a:picLocks noGrp="1" noChangeAspect="1"/>
+          </p:cNvPicPr>
+          <p:nvPr>
+            <p:ph idx="1"/>
+          </p:nvPr>
+        </p:nvPicPr>
+        <p:blipFill>
+          <a:blip r:embed="rId3"/>
+          <a:stretch>
+            <a:fillRect/>
+          </a:stretch>
+        </p:blipFill>
+        <p:spPr>
+          <a:xfrm>
+            <a:off x="53536" y="1972490"/>
+            <a:ext cx="4480560" cy="4800967"/>
+          </a:xfrm>
+          <a:prstGeom prst="rect">
+            <a:avLst/>
+          </a:prstGeom>
+        </p:spPr>
+      </p:pic>
+      <p:sp>
+        <p:nvSpPr>
+          <p:cNvPr id="5" name="TextBox 4">
+            <a:extLst>
+              <a:ext uri="{FF2B5EF4-FFF2-40B4-BE49-F238E27FC236}">
+                <a16:creationId xmlns:a16="http://schemas.microsoft.com/office/drawing/2014/main" id="{A5C63538-9D8F-D596-D4F6-46E69552FFED}"/>
+              </a:ext>
+            </a:extLst>
+          </p:cNvPr>
+          <p:cNvSpPr txBox="1"/>
+          <p:nvPr/>
+        </p:nvSpPr>
+        <p:spPr>
+          <a:xfrm>
+            <a:off x="663168" y="102348"/>
+            <a:ext cx="3767955" cy="523220"/>
+          </a:xfrm>
+          <a:prstGeom prst="rect">
+            <a:avLst/>
+          </a:prstGeom>
+          <a:noFill/>
+        </p:spPr>
+        <p:txBody>
+          <a:bodyPr wrap="none" rtlCol="0">
+            <a:spAutoFit/>
+          </a:bodyPr>
+          <a:lstStyle/>
+          <a:p>
+            <a:pPr marL="514350" indent="-514350">
+              <a:buFont typeface="+mj-lt"/>
+              <a:buAutoNum type="arabicPeriod"/>
+            </a:pPr>
+            <a:r>
+              <a:rPr lang="en-GB" sz="2800" dirty="0"/>
+              <a:t>Similar Architecture6</a:t>
+            </a:r>
+          </a:p>
+        </p:txBody>
+      </p:sp>
+      <p:pic>
+        <p:nvPicPr>
+          <p:cNvPr id="7" name="Picture 6">
+            <a:extLst>
+              <a:ext uri="{FF2B5EF4-FFF2-40B4-BE49-F238E27FC236}">
+                <a16:creationId xmlns:a16="http://schemas.microsoft.com/office/drawing/2014/main" id="{4CA1821B-E38D-72B5-7F4F-7E936126455C}"/>
+              </a:ext>
+            </a:extLst>
+          </p:cNvPr>
+          <p:cNvPicPr>
+            <a:picLocks noChangeAspect="1"/>
+          </p:cNvPicPr>
+          <p:nvPr/>
+        </p:nvPicPr>
+        <p:blipFill>
+          <a:blip r:embed="rId4"/>
+          <a:stretch>
+            <a:fillRect/>
+          </a:stretch>
+        </p:blipFill>
+        <p:spPr>
+          <a:xfrm>
+            <a:off x="4717915" y="0"/>
+            <a:ext cx="7420549" cy="6858000"/>
+          </a:xfrm>
+          <a:prstGeom prst="rect">
+            <a:avLst/>
+          </a:prstGeom>
+        </p:spPr>
+      </p:pic>
+    </p:spTree>
+    <p:extLst>
+      <p:ext uri="{BB962C8B-B14F-4D97-AF65-F5344CB8AC3E}">
+        <p14:creationId xmlns:p14="http://schemas.microsoft.com/office/powerpoint/2010/main" val="3281521946"/>
+      </p:ext>
+    </p:extLst>
+  </p:cSld>
+  <p:clrMapOvr>
+    <a:masterClrMapping/>
+  </p:clrMapOvr>
+</p:sld>
+</file>
+
+<file path=ppt/slides/slide24.xml><?xml version="1.0" encoding="utf-8"?>
 <p:sld xmlns:a="http://schemas.openxmlformats.org/drawingml/2006/main" xmlns:r="http://schemas.openxmlformats.org/officeDocument/2006/relationships" xmlns:p="http://schemas.openxmlformats.org/presentationml/2006/main">
   <p:cSld>
     <p:spTree>
@@ -10754,7 +11445,7 @@
           <p:cNvPr id="2" name="Title 1">
             <a:extLst>
               <a:ext uri="{FF2B5EF4-FFF2-40B4-BE49-F238E27FC236}">
-                <a16:creationId xmlns:a16="http://schemas.microsoft.com/office/drawing/2014/main" id="{537316FB-354F-8A5A-466F-84DBDFAF671D}"/>
+                <a16:creationId xmlns:a16="http://schemas.microsoft.com/office/drawing/2014/main" id="{D648D79B-77E2-36DD-7643-01C9CC7DA9F1}"/>
               </a:ext>
             </a:extLst>
           </p:cNvPr>
@@ -10767,24 +11458,22 @@
         </p:nvSpPr>
         <p:spPr/>
         <p:txBody>
-          <a:bodyPr>
-            <a:normAutofit/>
-          </a:bodyPr>
+          <a:bodyPr/>
           <a:lstStyle/>
           <a:p>
             <a:r>
               <a:rPr lang="en-GB" dirty="0"/>
-              <a:t>Domain-Invariant Mapping Network (DIMN)</a:t>
+              <a:t>Generalizable Person Re-identification</a:t>
             </a:r>
           </a:p>
         </p:txBody>
       </p:sp>
       <p:sp>
         <p:nvSpPr>
-          <p:cNvPr id="3" name="Content Placeholder 2">
-            <a:extLst>
-              <a:ext uri="{FF2B5EF4-FFF2-40B4-BE49-F238E27FC236}">
-                <a16:creationId xmlns:a16="http://schemas.microsoft.com/office/drawing/2014/main" id="{28DF7CE6-CFB2-EC08-BF92-52DCFAC29311}"/>
+          <p:cNvPr id="7" name="Content Placeholder 6">
+            <a:extLst>
+              <a:ext uri="{FF2B5EF4-FFF2-40B4-BE49-F238E27FC236}">
+                <a16:creationId xmlns:a16="http://schemas.microsoft.com/office/drawing/2014/main" id="{FEDA920D-886A-6B31-B38A-64DDFCD958C1}"/>
               </a:ext>
             </a:extLst>
           </p:cNvPr>
@@ -10795,24 +11484,59 @@
             <p:ph idx="1"/>
           </p:nvPr>
         </p:nvSpPr>
-        <p:spPr/>
+        <p:spPr>
+          <a:xfrm>
+            <a:off x="838199" y="1825625"/>
+            <a:ext cx="11153503" cy="4351338"/>
+          </a:xfrm>
+        </p:spPr>
         <p:txBody>
           <a:bodyPr/>
           <a:lstStyle/>
           <a:p>
             <a:r>
               <a:rPr lang="en-GB" dirty="0"/>
-              <a:t>is designed to learn a mapping between a person image and its identity classifier, i.e., it produces a classifier using a single shot.</a:t>
+              <a:t>Setting: SCM among identity </a:t>
+            </a:r>
+            <a:r>
+              <a:rPr lang="en-GB" dirty="0" err="1"/>
+              <a:t>labels_Y</a:t>
+            </a:r>
+            <a:r>
+              <a:rPr lang="en-GB" dirty="0"/>
+              <a:t>, identity-specific </a:t>
+            </a:r>
+            <a:r>
+              <a:rPr lang="en-GB" dirty="0" err="1"/>
+              <a:t>factors_S</a:t>
+            </a:r>
+            <a:r>
+              <a:rPr lang="en-GB" dirty="0"/>
+              <a:t>(clothing) and domain specific </a:t>
+            </a:r>
+            <a:r>
+              <a:rPr lang="en-GB" dirty="0" err="1"/>
+              <a:t>factors_V</a:t>
+            </a:r>
+            <a:r>
+              <a:rPr lang="en-GB" dirty="0"/>
+              <a:t>(background).</a:t>
+            </a:r>
+          </a:p>
+          <a:p>
+            <a:r>
+              <a:rPr lang="en-GB" dirty="0"/>
+              <a:t>Method: Disentangle the 2 factors into independent feature spaces.</a:t>
             </a:r>
           </a:p>
         </p:txBody>
       </p:sp>
       <p:pic>
         <p:nvPicPr>
-          <p:cNvPr id="4" name="Picture 3">
-            <a:extLst>
-              <a:ext uri="{FF2B5EF4-FFF2-40B4-BE49-F238E27FC236}">
-                <a16:creationId xmlns:a16="http://schemas.microsoft.com/office/drawing/2014/main" id="{DC8493B2-C8FB-A05D-B70F-A4A1848AE9B9}"/>
+          <p:cNvPr id="8" name="Picture 7">
+            <a:extLst>
+              <a:ext uri="{FF2B5EF4-FFF2-40B4-BE49-F238E27FC236}">
+                <a16:creationId xmlns:a16="http://schemas.microsoft.com/office/drawing/2014/main" id="{168CC7CF-E4FA-098F-0394-154757223BA7}"/>
               </a:ext>
             </a:extLst>
           </p:cNvPr>
@@ -10829,8 +11553,38 @@
         </p:blipFill>
         <p:spPr>
           <a:xfrm>
-            <a:off x="512085" y="3595254"/>
-            <a:ext cx="7772400" cy="6189570"/>
+            <a:off x="0" y="3559175"/>
+            <a:ext cx="6096000" cy="2637034"/>
+          </a:xfrm>
+          <a:prstGeom prst="rect">
+            <a:avLst/>
+          </a:prstGeom>
+        </p:spPr>
+      </p:pic>
+      <p:pic>
+        <p:nvPicPr>
+          <p:cNvPr id="9" name="Picture 8">
+            <a:extLst>
+              <a:ext uri="{FF2B5EF4-FFF2-40B4-BE49-F238E27FC236}">
+                <a16:creationId xmlns:a16="http://schemas.microsoft.com/office/drawing/2014/main" id="{0FA9CBD7-6F80-1590-E44E-09A3E27A1415}"/>
+              </a:ext>
+            </a:extLst>
+          </p:cNvPr>
+          <p:cNvPicPr>
+            <a:picLocks noChangeAspect="1"/>
+          </p:cNvPicPr>
+          <p:nvPr/>
+        </p:nvPicPr>
+        <p:blipFill>
+          <a:blip r:embed="rId3"/>
+          <a:stretch>
+            <a:fillRect/>
+          </a:stretch>
+        </p:blipFill>
+        <p:spPr>
+          <a:xfrm>
+            <a:off x="6414950" y="3559175"/>
+            <a:ext cx="5706290" cy="2478825"/>
           </a:xfrm>
           <a:prstGeom prst="rect">
             <a:avLst/>
@@ -10840,7 +11594,7 @@
     </p:spTree>
     <p:extLst>
       <p:ext uri="{BB962C8B-B14F-4D97-AF65-F5344CB8AC3E}">
-        <p14:creationId xmlns:p14="http://schemas.microsoft.com/office/powerpoint/2010/main" val="68043242"/>
+        <p14:creationId xmlns:p14="http://schemas.microsoft.com/office/powerpoint/2010/main" val="3213498854"/>
       </p:ext>
     </p:extLst>
   </p:cSld>
@@ -10850,7 +11604,370 @@
 </p:sld>
 </file>
 
-<file path=ppt/slides/slide23.xml><?xml version="1.0" encoding="utf-8"?>
+<file path=ppt/slides/slide25.xml><?xml version="1.0" encoding="utf-8"?>
+<p:sld xmlns:a="http://schemas.openxmlformats.org/drawingml/2006/main" xmlns:r="http://schemas.openxmlformats.org/officeDocument/2006/relationships" xmlns:p="http://schemas.openxmlformats.org/presentationml/2006/main">
+  <p:cSld>
+    <p:spTree>
+      <p:nvGrpSpPr>
+        <p:cNvPr id="1" name=""/>
+        <p:cNvGrpSpPr/>
+        <p:nvPr/>
+      </p:nvGrpSpPr>
+      <p:grpSpPr>
+        <a:xfrm>
+          <a:off x="0" y="0"/>
+          <a:ext cx="0" cy="0"/>
+          <a:chOff x="0" y="0"/>
+          <a:chExt cx="0" cy="0"/>
+        </a:xfrm>
+      </p:grpSpPr>
+      <p:pic>
+        <p:nvPicPr>
+          <p:cNvPr id="4" name="Picture 3">
+            <a:extLst>
+              <a:ext uri="{FF2B5EF4-FFF2-40B4-BE49-F238E27FC236}">
+                <a16:creationId xmlns:a16="http://schemas.microsoft.com/office/drawing/2014/main" id="{B9EA97FA-41EF-EC7A-8B18-12B97BD15E86}"/>
+              </a:ext>
+            </a:extLst>
+          </p:cNvPr>
+          <p:cNvPicPr>
+            <a:picLocks noChangeAspect="1"/>
+          </p:cNvPicPr>
+          <p:nvPr/>
+        </p:nvPicPr>
+        <p:blipFill>
+          <a:blip r:embed="rId2"/>
+          <a:stretch>
+            <a:fillRect/>
+          </a:stretch>
+        </p:blipFill>
+        <p:spPr>
+          <a:xfrm>
+            <a:off x="0" y="117203"/>
+            <a:ext cx="7594600" cy="3556000"/>
+          </a:xfrm>
+          <a:prstGeom prst="rect">
+            <a:avLst/>
+          </a:prstGeom>
+        </p:spPr>
+      </p:pic>
+      <p:pic>
+        <p:nvPicPr>
+          <p:cNvPr id="5" name="Picture 4">
+            <a:extLst>
+              <a:ext uri="{FF2B5EF4-FFF2-40B4-BE49-F238E27FC236}">
+                <a16:creationId xmlns:a16="http://schemas.microsoft.com/office/drawing/2014/main" id="{D9F88725-4C2B-8FE6-A73B-7AEB4DCEEF5E}"/>
+              </a:ext>
+            </a:extLst>
+          </p:cNvPr>
+          <p:cNvPicPr>
+            <a:picLocks noChangeAspect="1"/>
+          </p:cNvPicPr>
+          <p:nvPr/>
+        </p:nvPicPr>
+        <p:blipFill>
+          <a:blip r:embed="rId3"/>
+          <a:stretch>
+            <a:fillRect/>
+          </a:stretch>
+        </p:blipFill>
+        <p:spPr>
+          <a:xfrm>
+            <a:off x="50800" y="3887288"/>
+            <a:ext cx="7543800" cy="3238500"/>
+          </a:xfrm>
+          <a:prstGeom prst="rect">
+            <a:avLst/>
+          </a:prstGeom>
+        </p:spPr>
+      </p:pic>
+    </p:spTree>
+    <p:extLst>
+      <p:ext uri="{BB962C8B-B14F-4D97-AF65-F5344CB8AC3E}">
+        <p14:creationId xmlns:p14="http://schemas.microsoft.com/office/powerpoint/2010/main" val="1460582782"/>
+      </p:ext>
+    </p:extLst>
+  </p:cSld>
+  <p:clrMapOvr>
+    <a:masterClrMapping/>
+  </p:clrMapOvr>
+</p:sld>
+</file>
+
+<file path=ppt/slides/slide26.xml><?xml version="1.0" encoding="utf-8"?>
+<p:sld xmlns:a="http://schemas.openxmlformats.org/drawingml/2006/main" xmlns:r="http://schemas.openxmlformats.org/officeDocument/2006/relationships" xmlns:p="http://schemas.openxmlformats.org/presentationml/2006/main">
+  <p:cSld>
+    <p:spTree>
+      <p:nvGrpSpPr>
+        <p:cNvPr id="1" name=""/>
+        <p:cNvGrpSpPr/>
+        <p:nvPr/>
+      </p:nvGrpSpPr>
+      <p:grpSpPr>
+        <a:xfrm>
+          <a:off x="0" y="0"/>
+          <a:ext cx="0" cy="0"/>
+          <a:chOff x="0" y="0"/>
+          <a:chExt cx="0" cy="0"/>
+        </a:xfrm>
+      </p:grpSpPr>
+      <p:pic>
+        <p:nvPicPr>
+          <p:cNvPr id="5" name="Picture 4">
+            <a:extLst>
+              <a:ext uri="{FF2B5EF4-FFF2-40B4-BE49-F238E27FC236}">
+                <a16:creationId xmlns:a16="http://schemas.microsoft.com/office/drawing/2014/main" id="{96C5D604-538C-FCA9-2B3B-F9C3774A7F27}"/>
+              </a:ext>
+            </a:extLst>
+          </p:cNvPr>
+          <p:cNvPicPr>
+            <a:picLocks noChangeAspect="1"/>
+          </p:cNvPicPr>
+          <p:nvPr/>
+        </p:nvPicPr>
+        <p:blipFill>
+          <a:blip r:embed="rId3"/>
+          <a:stretch>
+            <a:fillRect/>
+          </a:stretch>
+        </p:blipFill>
+        <p:spPr>
+          <a:xfrm>
+            <a:off x="0" y="1498004"/>
+            <a:ext cx="11895763" cy="3861992"/>
+          </a:xfrm>
+          <a:prstGeom prst="rect">
+            <a:avLst/>
+          </a:prstGeom>
+        </p:spPr>
+      </p:pic>
+      <p:sp>
+        <p:nvSpPr>
+          <p:cNvPr id="7" name="TextBox 6">
+            <a:extLst>
+              <a:ext uri="{FF2B5EF4-FFF2-40B4-BE49-F238E27FC236}">
+                <a16:creationId xmlns:a16="http://schemas.microsoft.com/office/drawing/2014/main" id="{AE277866-A46A-B53C-5A63-A0BF736222A2}"/>
+              </a:ext>
+            </a:extLst>
+          </p:cNvPr>
+          <p:cNvSpPr txBox="1"/>
+          <p:nvPr/>
+        </p:nvSpPr>
+        <p:spPr>
+          <a:xfrm>
+            <a:off x="408214" y="244929"/>
+            <a:ext cx="2898679" cy="523220"/>
+          </a:xfrm>
+          <a:prstGeom prst="rect">
+            <a:avLst/>
+          </a:prstGeom>
+          <a:noFill/>
+        </p:spPr>
+        <p:txBody>
+          <a:bodyPr wrap="none" rtlCol="0">
+            <a:spAutoFit/>
+          </a:bodyPr>
+          <a:lstStyle/>
+          <a:p>
+            <a:r>
+              <a:rPr lang="en-GB" sz="2800" dirty="0"/>
+              <a:t>Semantic Encoder:</a:t>
+            </a:r>
+          </a:p>
+        </p:txBody>
+      </p:sp>
+    </p:spTree>
+    <p:extLst>
+      <p:ext uri="{BB962C8B-B14F-4D97-AF65-F5344CB8AC3E}">
+        <p14:creationId xmlns:p14="http://schemas.microsoft.com/office/powerpoint/2010/main" val="2184145090"/>
+      </p:ext>
+    </p:extLst>
+  </p:cSld>
+  <p:clrMapOvr>
+    <a:masterClrMapping/>
+  </p:clrMapOvr>
+</p:sld>
+</file>
+
+<file path=ppt/slides/slide27.xml><?xml version="1.0" encoding="utf-8"?>
+<p:sld xmlns:a="http://schemas.openxmlformats.org/drawingml/2006/main" xmlns:r="http://schemas.openxmlformats.org/officeDocument/2006/relationships" xmlns:p="http://schemas.openxmlformats.org/presentationml/2006/main">
+  <p:cSld>
+    <p:spTree>
+      <p:nvGrpSpPr>
+        <p:cNvPr id="1" name=""/>
+        <p:cNvGrpSpPr/>
+        <p:nvPr/>
+      </p:nvGrpSpPr>
+      <p:grpSpPr>
+        <a:xfrm>
+          <a:off x="0" y="0"/>
+          <a:ext cx="0" cy="0"/>
+          <a:chOff x="0" y="0"/>
+          <a:chExt cx="0" cy="0"/>
+        </a:xfrm>
+      </p:grpSpPr>
+      <p:sp>
+        <p:nvSpPr>
+          <p:cNvPr id="2" name="Title 1">
+            <a:extLst>
+              <a:ext uri="{FF2B5EF4-FFF2-40B4-BE49-F238E27FC236}">
+                <a16:creationId xmlns:a16="http://schemas.microsoft.com/office/drawing/2014/main" id="{775ABCDD-945A-6816-6AC1-506F37E049F8}"/>
+              </a:ext>
+            </a:extLst>
+          </p:cNvPr>
+          <p:cNvSpPr>
+            <a:spLocks noGrp="1"/>
+          </p:cNvSpPr>
+          <p:nvPr>
+            <p:ph type="title"/>
+          </p:nvPr>
+        </p:nvSpPr>
+        <p:spPr/>
+        <p:txBody>
+          <a:bodyPr/>
+          <a:lstStyle/>
+          <a:p>
+            <a:r>
+              <a:rPr lang="en-GB" dirty="0"/>
+              <a:t>Back to our problems</a:t>
+            </a:r>
+          </a:p>
+        </p:txBody>
+      </p:sp>
+      <p:sp>
+        <p:nvSpPr>
+          <p:cNvPr id="3" name="Content Placeholder 2">
+            <a:extLst>
+              <a:ext uri="{FF2B5EF4-FFF2-40B4-BE49-F238E27FC236}">
+                <a16:creationId xmlns:a16="http://schemas.microsoft.com/office/drawing/2014/main" id="{A65DEDC5-E1BC-7903-B644-F54A8A4E62FD}"/>
+              </a:ext>
+            </a:extLst>
+          </p:cNvPr>
+          <p:cNvSpPr>
+            <a:spLocks noGrp="1"/>
+          </p:cNvSpPr>
+          <p:nvPr>
+            <p:ph idx="1"/>
+          </p:nvPr>
+        </p:nvSpPr>
+        <p:spPr/>
+        <p:txBody>
+          <a:bodyPr/>
+          <a:lstStyle/>
+          <a:p>
+            <a:r>
+              <a:rPr lang="en-GB" dirty="0"/>
+              <a:t>We don’t have unannotated large dataset.</a:t>
+            </a:r>
+          </a:p>
+        </p:txBody>
+      </p:sp>
+    </p:spTree>
+    <p:extLst>
+      <p:ext uri="{BB962C8B-B14F-4D97-AF65-F5344CB8AC3E}">
+        <p14:creationId xmlns:p14="http://schemas.microsoft.com/office/powerpoint/2010/main" val="845743270"/>
+      </p:ext>
+    </p:extLst>
+  </p:cSld>
+  <p:clrMapOvr>
+    <a:masterClrMapping/>
+  </p:clrMapOvr>
+</p:sld>
+</file>
+
+<file path=ppt/slides/slide28.xml><?xml version="1.0" encoding="utf-8"?>
+<p:sld xmlns:a="http://schemas.openxmlformats.org/drawingml/2006/main" xmlns:r="http://schemas.openxmlformats.org/officeDocument/2006/relationships" xmlns:p="http://schemas.openxmlformats.org/presentationml/2006/main">
+  <p:cSld>
+    <p:spTree>
+      <p:nvGrpSpPr>
+        <p:cNvPr id="1" name=""/>
+        <p:cNvGrpSpPr/>
+        <p:nvPr/>
+      </p:nvGrpSpPr>
+      <p:grpSpPr>
+        <a:xfrm>
+          <a:off x="0" y="0"/>
+          <a:ext cx="0" cy="0"/>
+          <a:chOff x="0" y="0"/>
+          <a:chExt cx="0" cy="0"/>
+        </a:xfrm>
+      </p:grpSpPr>
+      <p:pic>
+        <p:nvPicPr>
+          <p:cNvPr id="4" name="Content Placeholder 3">
+            <a:extLst>
+              <a:ext uri="{FF2B5EF4-FFF2-40B4-BE49-F238E27FC236}">
+                <a16:creationId xmlns:a16="http://schemas.microsoft.com/office/drawing/2014/main" id="{C8FC1E0F-45C7-C33B-044F-51106FB3D221}"/>
+              </a:ext>
+            </a:extLst>
+          </p:cNvPr>
+          <p:cNvPicPr>
+            <a:picLocks noGrp="1" noChangeAspect="1"/>
+          </p:cNvPicPr>
+          <p:nvPr>
+            <p:ph idx="1"/>
+          </p:nvPr>
+        </p:nvPicPr>
+        <p:blipFill>
+          <a:blip r:embed="rId2"/>
+          <a:stretch>
+            <a:fillRect/>
+          </a:stretch>
+        </p:blipFill>
+        <p:spPr>
+          <a:xfrm>
+            <a:off x="372565" y="1432855"/>
+            <a:ext cx="5464084" cy="4351338"/>
+          </a:xfrm>
+          <a:prstGeom prst="rect">
+            <a:avLst/>
+          </a:prstGeom>
+        </p:spPr>
+      </p:pic>
+      <p:pic>
+        <p:nvPicPr>
+          <p:cNvPr id="5" name="Picture 4">
+            <a:extLst>
+              <a:ext uri="{FF2B5EF4-FFF2-40B4-BE49-F238E27FC236}">
+                <a16:creationId xmlns:a16="http://schemas.microsoft.com/office/drawing/2014/main" id="{062827B6-26F9-4E30-72A5-53C8BDB67B30}"/>
+              </a:ext>
+            </a:extLst>
+          </p:cNvPr>
+          <p:cNvPicPr>
+            <a:picLocks noChangeAspect="1"/>
+          </p:cNvPicPr>
+          <p:nvPr/>
+        </p:nvPicPr>
+        <p:blipFill>
+          <a:blip r:embed="rId3"/>
+          <a:stretch>
+            <a:fillRect/>
+          </a:stretch>
+        </p:blipFill>
+        <p:spPr>
+          <a:xfrm>
+            <a:off x="6970205" y="715913"/>
+            <a:ext cx="4674929" cy="5236581"/>
+          </a:xfrm>
+          <a:prstGeom prst="rect">
+            <a:avLst/>
+          </a:prstGeom>
+        </p:spPr>
+      </p:pic>
+    </p:spTree>
+    <p:extLst>
+      <p:ext uri="{BB962C8B-B14F-4D97-AF65-F5344CB8AC3E}">
+        <p14:creationId xmlns:p14="http://schemas.microsoft.com/office/powerpoint/2010/main" val="2236970041"/>
+      </p:ext>
+    </p:extLst>
+  </p:cSld>
+  <p:clrMapOvr>
+    <a:masterClrMapping/>
+  </p:clrMapOvr>
+</p:sld>
+</file>
+
+<file path=ppt/slides/slide29.xml><?xml version="1.0" encoding="utf-8"?>
 <p:sld xmlns:a="http://schemas.openxmlformats.org/drawingml/2006/main" xmlns:r="http://schemas.openxmlformats.org/officeDocument/2006/relationships" xmlns:p="http://schemas.openxmlformats.org/presentationml/2006/main">
   <p:cSld>
     <p:bg>
@@ -14650,4 +15767,299 @@
     </a:ext>
   </a:extLst>
 </a:theme>
+</file>
+
+<file path=ppt/theme/theme2.xml><?xml version="1.0" encoding="utf-8"?>
+<a:theme xmlns:a="http://schemas.openxmlformats.org/drawingml/2006/main" name="Office Theme">
+  <a:themeElements>
+    <a:clrScheme name="Office">
+      <a:dk1>
+        <a:sysClr val="windowText" lastClr="000000"/>
+      </a:dk1>
+      <a:lt1>
+        <a:sysClr val="window" lastClr="FFFFFF"/>
+      </a:lt1>
+      <a:dk2>
+        <a:srgbClr val="44546A"/>
+      </a:dk2>
+      <a:lt2>
+        <a:srgbClr val="E7E6E6"/>
+      </a:lt2>
+      <a:accent1>
+        <a:srgbClr val="4472C4"/>
+      </a:accent1>
+      <a:accent2>
+        <a:srgbClr val="ED7D31"/>
+      </a:accent2>
+      <a:accent3>
+        <a:srgbClr val="A5A5A5"/>
+      </a:accent3>
+      <a:accent4>
+        <a:srgbClr val="FFC000"/>
+      </a:accent4>
+      <a:accent5>
+        <a:srgbClr val="5B9BD5"/>
+      </a:accent5>
+      <a:accent6>
+        <a:srgbClr val="70AD47"/>
+      </a:accent6>
+      <a:hlink>
+        <a:srgbClr val="0563C1"/>
+      </a:hlink>
+      <a:folHlink>
+        <a:srgbClr val="954F72"/>
+      </a:folHlink>
+    </a:clrScheme>
+    <a:fontScheme name="Office">
+      <a:majorFont>
+        <a:latin typeface="Calibri Light" panose="020F0302020204030204"/>
+        <a:ea typeface=""/>
+        <a:cs typeface=""/>
+        <a:font script="Jpan" typeface="游ゴシック Light"/>
+        <a:font script="Hang" typeface="맑은 고딕"/>
+        <a:font script="Hans" typeface="等线 Light"/>
+        <a:font script="Hant" typeface="新細明體"/>
+        <a:font script="Arab" typeface="Times New Roman"/>
+        <a:font script="Hebr" typeface="Times New Roman"/>
+        <a:font script="Thai" typeface="Angsana New"/>
+        <a:font script="Ethi" typeface="Nyala"/>
+        <a:font script="Beng" typeface="Vrinda"/>
+        <a:font script="Gujr" typeface="Shruti"/>
+        <a:font script="Khmr" typeface="MoolBoran"/>
+        <a:font script="Knda" typeface="Tunga"/>
+        <a:font script="Guru" typeface="Raavi"/>
+        <a:font script="Cans" typeface="Euphemia"/>
+        <a:font script="Cher" typeface="Plantagenet Cherokee"/>
+        <a:font script="Yiii" typeface="Microsoft Yi Baiti"/>
+        <a:font script="Tibt" typeface="Microsoft Himalaya"/>
+        <a:font script="Thaa" typeface="MV Boli"/>
+        <a:font script="Deva" typeface="Mangal"/>
+        <a:font script="Telu" typeface="Gautami"/>
+        <a:font script="Taml" typeface="Latha"/>
+        <a:font script="Syrc" typeface="Estrangelo Edessa"/>
+        <a:font script="Orya" typeface="Kalinga"/>
+        <a:font script="Mlym" typeface="Kartika"/>
+        <a:font script="Laoo" typeface="DokChampa"/>
+        <a:font script="Sinh" typeface="Iskoola Pota"/>
+        <a:font script="Mong" typeface="Mongolian Baiti"/>
+        <a:font script="Viet" typeface="Times New Roman"/>
+        <a:font script="Uigh" typeface="Microsoft Uighur"/>
+        <a:font script="Geor" typeface="Sylfaen"/>
+        <a:font script="Armn" typeface="Arial"/>
+        <a:font script="Bugi" typeface="Leelawadee UI"/>
+        <a:font script="Bopo" typeface="Microsoft JhengHei"/>
+        <a:font script="Java" typeface="Javanese Text"/>
+        <a:font script="Lisu" typeface="Segoe UI"/>
+        <a:font script="Mymr" typeface="Myanmar Text"/>
+        <a:font script="Nkoo" typeface="Ebrima"/>
+        <a:font script="Olck" typeface="Nirmala UI"/>
+        <a:font script="Osma" typeface="Ebrima"/>
+        <a:font script="Phag" typeface="Phagspa"/>
+        <a:font script="Syrn" typeface="Estrangelo Edessa"/>
+        <a:font script="Syrj" typeface="Estrangelo Edessa"/>
+        <a:font script="Syre" typeface="Estrangelo Edessa"/>
+        <a:font script="Sora" typeface="Nirmala UI"/>
+        <a:font script="Tale" typeface="Microsoft Tai Le"/>
+        <a:font script="Talu" typeface="Microsoft New Tai Lue"/>
+        <a:font script="Tfng" typeface="Ebrima"/>
+      </a:majorFont>
+      <a:minorFont>
+        <a:latin typeface="Calibri" panose="020F0502020204030204"/>
+        <a:ea typeface=""/>
+        <a:cs typeface=""/>
+        <a:font script="Jpan" typeface="游ゴシック"/>
+        <a:font script="Hang" typeface="맑은 고딕"/>
+        <a:font script="Hans" typeface="等线"/>
+        <a:font script="Hant" typeface="新細明體"/>
+        <a:font script="Arab" typeface="Arial"/>
+        <a:font script="Hebr" typeface="Arial"/>
+        <a:font script="Thai" typeface="Cordia New"/>
+        <a:font script="Ethi" typeface="Nyala"/>
+        <a:font script="Beng" typeface="Vrinda"/>
+        <a:font script="Gujr" typeface="Shruti"/>
+        <a:font script="Khmr" typeface="DaunPenh"/>
+        <a:font script="Knda" typeface="Tunga"/>
+        <a:font script="Guru" typeface="Raavi"/>
+        <a:font script="Cans" typeface="Euphemia"/>
+        <a:font script="Cher" typeface="Plantagenet Cherokee"/>
+        <a:font script="Yiii" typeface="Microsoft Yi Baiti"/>
+        <a:font script="Tibt" typeface="Microsoft Himalaya"/>
+        <a:font script="Thaa" typeface="MV Boli"/>
+        <a:font script="Deva" typeface="Mangal"/>
+        <a:font script="Telu" typeface="Gautami"/>
+        <a:font script="Taml" typeface="Latha"/>
+        <a:font script="Syrc" typeface="Estrangelo Edessa"/>
+        <a:font script="Orya" typeface="Kalinga"/>
+        <a:font script="Mlym" typeface="Kartika"/>
+        <a:font script="Laoo" typeface="DokChampa"/>
+        <a:font script="Sinh" typeface="Iskoola Pota"/>
+        <a:font script="Mong" typeface="Mongolian Baiti"/>
+        <a:font script="Viet" typeface="Arial"/>
+        <a:font script="Uigh" typeface="Microsoft Uighur"/>
+        <a:font script="Geor" typeface="Sylfaen"/>
+        <a:font script="Armn" typeface="Arial"/>
+        <a:font script="Bugi" typeface="Leelawadee UI"/>
+        <a:font script="Bopo" typeface="Microsoft JhengHei"/>
+        <a:font script="Java" typeface="Javanese Text"/>
+        <a:font script="Lisu" typeface="Segoe UI"/>
+        <a:font script="Mymr" typeface="Myanmar Text"/>
+        <a:font script="Nkoo" typeface="Ebrima"/>
+        <a:font script="Olck" typeface="Nirmala UI"/>
+        <a:font script="Osma" typeface="Ebrima"/>
+        <a:font script="Phag" typeface="Phagspa"/>
+        <a:font script="Syrn" typeface="Estrangelo Edessa"/>
+        <a:font script="Syrj" typeface="Estrangelo Edessa"/>
+        <a:font script="Syre" typeface="Estrangelo Edessa"/>
+        <a:font script="Sora" typeface="Nirmala UI"/>
+        <a:font script="Tale" typeface="Microsoft Tai Le"/>
+        <a:font script="Talu" typeface="Microsoft New Tai Lue"/>
+        <a:font script="Tfng" typeface="Ebrima"/>
+      </a:minorFont>
+    </a:fontScheme>
+    <a:fmtScheme name="Office">
+      <a:fillStyleLst>
+        <a:solidFill>
+          <a:schemeClr val="phClr"/>
+        </a:solidFill>
+        <a:gradFill rotWithShape="1">
+          <a:gsLst>
+            <a:gs pos="0">
+              <a:schemeClr val="phClr">
+                <a:lumMod val="110000"/>
+                <a:satMod val="105000"/>
+                <a:tint val="67000"/>
+              </a:schemeClr>
+            </a:gs>
+            <a:gs pos="50000">
+              <a:schemeClr val="phClr">
+                <a:lumMod val="105000"/>
+                <a:satMod val="103000"/>
+                <a:tint val="73000"/>
+              </a:schemeClr>
+            </a:gs>
+            <a:gs pos="100000">
+              <a:schemeClr val="phClr">
+                <a:lumMod val="105000"/>
+                <a:satMod val="109000"/>
+                <a:tint val="81000"/>
+              </a:schemeClr>
+            </a:gs>
+          </a:gsLst>
+          <a:lin ang="5400000" scaled="0"/>
+        </a:gradFill>
+        <a:gradFill rotWithShape="1">
+          <a:gsLst>
+            <a:gs pos="0">
+              <a:schemeClr val="phClr">
+                <a:satMod val="103000"/>
+                <a:lumMod val="102000"/>
+                <a:tint val="94000"/>
+              </a:schemeClr>
+            </a:gs>
+            <a:gs pos="50000">
+              <a:schemeClr val="phClr">
+                <a:satMod val="110000"/>
+                <a:lumMod val="100000"/>
+                <a:shade val="100000"/>
+              </a:schemeClr>
+            </a:gs>
+            <a:gs pos="100000">
+              <a:schemeClr val="phClr">
+                <a:lumMod val="99000"/>
+                <a:satMod val="120000"/>
+                <a:shade val="78000"/>
+              </a:schemeClr>
+            </a:gs>
+          </a:gsLst>
+          <a:lin ang="5400000" scaled="0"/>
+        </a:gradFill>
+      </a:fillStyleLst>
+      <a:lnStyleLst>
+        <a:ln w="6350" cap="flat" cmpd="sng" algn="ctr">
+          <a:solidFill>
+            <a:schemeClr val="phClr"/>
+          </a:solidFill>
+          <a:prstDash val="solid"/>
+          <a:miter lim="800000"/>
+        </a:ln>
+        <a:ln w="12700" cap="flat" cmpd="sng" algn="ctr">
+          <a:solidFill>
+            <a:schemeClr val="phClr"/>
+          </a:solidFill>
+          <a:prstDash val="solid"/>
+          <a:miter lim="800000"/>
+        </a:ln>
+        <a:ln w="19050" cap="flat" cmpd="sng" algn="ctr">
+          <a:solidFill>
+            <a:schemeClr val="phClr"/>
+          </a:solidFill>
+          <a:prstDash val="solid"/>
+          <a:miter lim="800000"/>
+        </a:ln>
+      </a:lnStyleLst>
+      <a:effectStyleLst>
+        <a:effectStyle>
+          <a:effectLst/>
+        </a:effectStyle>
+        <a:effectStyle>
+          <a:effectLst/>
+        </a:effectStyle>
+        <a:effectStyle>
+          <a:effectLst>
+            <a:outerShdw blurRad="57150" dist="19050" dir="5400000" algn="ctr" rotWithShape="0">
+              <a:srgbClr val="000000">
+                <a:alpha val="63000"/>
+              </a:srgbClr>
+            </a:outerShdw>
+          </a:effectLst>
+        </a:effectStyle>
+      </a:effectStyleLst>
+      <a:bgFillStyleLst>
+        <a:solidFill>
+          <a:schemeClr val="phClr"/>
+        </a:solidFill>
+        <a:solidFill>
+          <a:schemeClr val="phClr">
+            <a:tint val="95000"/>
+            <a:satMod val="170000"/>
+          </a:schemeClr>
+        </a:solidFill>
+        <a:gradFill rotWithShape="1">
+          <a:gsLst>
+            <a:gs pos="0">
+              <a:schemeClr val="phClr">
+                <a:tint val="93000"/>
+                <a:satMod val="150000"/>
+                <a:shade val="98000"/>
+                <a:lumMod val="102000"/>
+              </a:schemeClr>
+            </a:gs>
+            <a:gs pos="50000">
+              <a:schemeClr val="phClr">
+                <a:tint val="98000"/>
+                <a:satMod val="130000"/>
+                <a:shade val="90000"/>
+                <a:lumMod val="103000"/>
+              </a:schemeClr>
+            </a:gs>
+            <a:gs pos="100000">
+              <a:schemeClr val="phClr">
+                <a:shade val="63000"/>
+                <a:satMod val="120000"/>
+              </a:schemeClr>
+            </a:gs>
+          </a:gsLst>
+          <a:lin ang="5400000" scaled="0"/>
+        </a:gradFill>
+      </a:bgFillStyleLst>
+    </a:fmtScheme>
+  </a:themeElements>
+  <a:objectDefaults/>
+  <a:extraClrSchemeLst/>
+  <a:extLst>
+    <a:ext uri="{05A4C25C-085E-4340-85A3-A5531E510DB2}">
+      <thm15:themeFamily xmlns:thm15="http://schemas.microsoft.com/office/thememl/2012/main" name="Office Theme" id="{62F939B6-93AF-4DB8-9C6B-D6C7DFDC589F}" vid="{4A3C46E8-61CC-4603-A589-7422A47A8E4A}"/>
+    </a:ext>
+  </a:extLst>
+</a:theme>
 </file>
--- a/img/headers/Presentation_During_Meeting [Auto-saved].pptx
+++ b/img/headers/Presentation_During_Meeting [Auto-saved].pptx
@@ -2011,7 +2011,7 @@
           <a:p>
             <a:fld id="{A5C25525-F7D1-5B4F-9342-E93CEDD79A5C}" type="datetimeFigureOut">
               <a:rPr lang="en-GB" smtClean="0"/>
-              <a:t>04/02/2023</a:t>
+              <a:t>12/02/2023</a:t>
             </a:fld>
             <a:endParaRPr lang="en-GB"/>
           </a:p>
@@ -2509,7 +2509,7 @@
           <a:p>
             <a:fld id="{AE31A6DE-3705-5747-AEBF-BD3705E1DA93}" type="datetimeFigureOut">
               <a:rPr lang="en-GB" smtClean="0"/>
-              <a:t>04/02/2023</a:t>
+              <a:t>12/02/2023</a:t>
             </a:fld>
             <a:endParaRPr lang="en-GB" dirty="0"/>
           </a:p>
@@ -2707,7 +2707,7 @@
           <a:p>
             <a:fld id="{AE31A6DE-3705-5747-AEBF-BD3705E1DA93}" type="datetimeFigureOut">
               <a:rPr lang="en-GB" smtClean="0"/>
-              <a:t>04/02/2023</a:t>
+              <a:t>12/02/2023</a:t>
             </a:fld>
             <a:endParaRPr lang="en-GB" dirty="0"/>
           </a:p>
@@ -2915,7 +2915,7 @@
           <a:p>
             <a:fld id="{AE31A6DE-3705-5747-AEBF-BD3705E1DA93}" type="datetimeFigureOut">
               <a:rPr lang="en-GB" smtClean="0"/>
-              <a:t>04/02/2023</a:t>
+              <a:t>12/02/2023</a:t>
             </a:fld>
             <a:endParaRPr lang="en-GB" dirty="0"/>
           </a:p>
@@ -3113,7 +3113,7 @@
           <a:p>
             <a:fld id="{AE31A6DE-3705-5747-AEBF-BD3705E1DA93}" type="datetimeFigureOut">
               <a:rPr lang="en-GB" smtClean="0"/>
-              <a:t>04/02/2023</a:t>
+              <a:t>12/02/2023</a:t>
             </a:fld>
             <a:endParaRPr lang="en-GB" dirty="0"/>
           </a:p>
@@ -3388,7 +3388,7 @@
           <a:p>
             <a:fld id="{AE31A6DE-3705-5747-AEBF-BD3705E1DA93}" type="datetimeFigureOut">
               <a:rPr lang="en-GB" smtClean="0"/>
-              <a:t>04/02/2023</a:t>
+              <a:t>12/02/2023</a:t>
             </a:fld>
             <a:endParaRPr lang="en-GB" dirty="0"/>
           </a:p>
@@ -3653,7 +3653,7 @@
           <a:p>
             <a:fld id="{AE31A6DE-3705-5747-AEBF-BD3705E1DA93}" type="datetimeFigureOut">
               <a:rPr lang="en-GB" smtClean="0"/>
-              <a:t>04/02/2023</a:t>
+              <a:t>12/02/2023</a:t>
             </a:fld>
             <a:endParaRPr lang="en-GB" dirty="0"/>
           </a:p>
@@ -4065,7 +4065,7 @@
           <a:p>
             <a:fld id="{AE31A6DE-3705-5747-AEBF-BD3705E1DA93}" type="datetimeFigureOut">
               <a:rPr lang="en-GB" smtClean="0"/>
-              <a:t>04/02/2023</a:t>
+              <a:t>12/02/2023</a:t>
             </a:fld>
             <a:endParaRPr lang="en-GB" dirty="0"/>
           </a:p>
@@ -4206,7 +4206,7 @@
           <a:p>
             <a:fld id="{AE31A6DE-3705-5747-AEBF-BD3705E1DA93}" type="datetimeFigureOut">
               <a:rPr lang="en-GB" smtClean="0"/>
-              <a:t>04/02/2023</a:t>
+              <a:t>12/02/2023</a:t>
             </a:fld>
             <a:endParaRPr lang="en-GB" dirty="0"/>
           </a:p>
@@ -4319,7 +4319,7 @@
           <a:p>
             <a:fld id="{AE31A6DE-3705-5747-AEBF-BD3705E1DA93}" type="datetimeFigureOut">
               <a:rPr lang="en-GB" smtClean="0"/>
-              <a:t>04/02/2023</a:t>
+              <a:t>12/02/2023</a:t>
             </a:fld>
             <a:endParaRPr lang="en-GB" dirty="0"/>
           </a:p>
@@ -4630,7 +4630,7 @@
           <a:p>
             <a:fld id="{AE31A6DE-3705-5747-AEBF-BD3705E1DA93}" type="datetimeFigureOut">
               <a:rPr lang="en-GB" smtClean="0"/>
-              <a:t>04/02/2023</a:t>
+              <a:t>12/02/2023</a:t>
             </a:fld>
             <a:endParaRPr lang="en-GB" dirty="0"/>
           </a:p>
@@ -4918,7 +4918,7 @@
           <a:p>
             <a:fld id="{AE31A6DE-3705-5747-AEBF-BD3705E1DA93}" type="datetimeFigureOut">
               <a:rPr lang="en-GB" smtClean="0"/>
-              <a:t>04/02/2023</a:t>
+              <a:t>12/02/2023</a:t>
             </a:fld>
             <a:endParaRPr lang="en-GB" dirty="0"/>
           </a:p>
@@ -5159,7 +5159,7 @@
           <a:p>
             <a:fld id="{AE31A6DE-3705-5747-AEBF-BD3705E1DA93}" type="datetimeFigureOut">
               <a:rPr lang="en-GB" smtClean="0"/>
-              <a:t>04/02/2023</a:t>
+              <a:t>12/02/2023</a:t>
             </a:fld>
             <a:endParaRPr lang="en-GB" dirty="0"/>
           </a:p>
@@ -11241,7 +11241,7 @@
         </p:blipFill>
         <p:spPr>
           <a:xfrm>
-            <a:off x="2889158" y="1509512"/>
+            <a:off x="3151910" y="1509512"/>
             <a:ext cx="8136913" cy="5348488"/>
           </a:xfrm>
           <a:prstGeom prst="rect">
@@ -11733,7 +11733,7 @@
         </p:blipFill>
         <p:spPr>
           <a:xfrm>
-            <a:off x="0" y="1498004"/>
+            <a:off x="296237" y="1498004"/>
             <a:ext cx="11895763" cy="3861992"/>
           </a:xfrm>
           <a:prstGeom prst="rect">
